--- a/decks/triple-light/triple-light_ch3_colour.pptx
+++ b/decks/triple-light/triple-light_ch3_colour.pptx
@@ -125,30 +125,30 @@
   <p:extLst>
     <p:ext uri="{521415D9-36F7-43E2-AB2F-B90AF26B5E84}">
       <p14:sectionLst xmlns:p14="http://schemas.microsoft.com/office/powerpoint/2010/main">
-        <p14:section name="Opening" id="{fc9388d4-da03-e987-2865-14250935cc96}">
+        <p14:section name="Opening" id="{b6d7a5b0-8f32-b5df-d3f6-ee928f7d949a}">
           <p14:sldIdLst>
             <p14:sldId id="256"/>
           </p14:sldIdLst>
         </p14:section>
-        <p14:section name="Gate" id="{187a5af3-7d3f-529d-3c9b-f1b99687d1d3}">
+        <p14:section name="Gate" id="{ea5ab6fb-2fe7-fdaa-12d9-c680a6d4dbc0}">
           <p14:sldIdLst>
             <p14:sldId id="257"/>
             <p14:sldId id="258"/>
           </p14:sldIdLst>
         </p14:section>
-        <p14:section name="Pre-teach" id="{eec5ebfb-7b86-aa15-68e6-0411dbb3fbf9}">
+        <p14:section name="Pre-teach" id="{f1b1a7ce-9c4d-e86e-02b0-06b67f2b5420}">
           <p14:sldIdLst>
             <p14:sldId id="259"/>
             <p14:sldId id="260"/>
           </p14:sldIdLst>
         </p14:section>
-        <p14:section name="Read-along" id="{75fea0af-a83b-8b21-2f71-9f7ea583f529}">
+        <p14:section name="Read-along" id="{52a7a62e-0291-abb7-c4ec-34781a7eb901}">
           <p14:sldIdLst>
             <p14:sldId id="261"/>
             <p14:sldId id="262"/>
           </p14:sldIdLst>
         </p14:section>
-        <p14:section name="Teach" id="{f3471b89-664f-0604-d7a6-40f987077c18}">
+        <p14:section name="Teach" id="{40ea41c1-6831-19e5-997e-2e8db3523487}">
           <p14:sldIdLst>
             <p14:sldId id="263"/>
             <p14:sldId id="264"/>
@@ -157,19 +157,19 @@
             <p14:sldId id="267"/>
           </p14:sldIdLst>
         </p14:section>
-        <p14:section name="Routes" id="{fbfc2745-aaf3-6095-fca3-6aaf71851761}">
+        <p14:section name="Routes" id="{7de62490-176e-3be0-e386-c176515bab8b}">
           <p14:sldIdLst>
             <p14:sldId id="268"/>
             <p14:sldId id="269"/>
             <p14:sldId id="270"/>
           </p14:sldIdLst>
         </p14:section>
-        <p14:section name="Close" id="{2b431482-2dec-1053-4b68-4cf9177f5265}">
+        <p14:section name="Close" id="{9b6abc03-ff82-f355-6210-565bf61e7887}">
           <p14:sldIdLst>
             <p14:sldId id="271"/>
           </p14:sldIdLst>
         </p14:section>
-        <p14:section name="Answers" id="{23234549-6f65-15c7-b0c8-8845e13eacb9}">
+        <p14:section name="Answers" id="{7bcc4f5a-6e67-445f-2870-ab4a1240a1a6}">
           <p14:sldIdLst>
             <p14:sldId id="272"/>
             <p14:sldId id="273"/>
@@ -1230,7 +1230,7 @@
               <a:rPr lang="en-US" dirty="0"/>
               <a:t>Exit ticket — individual, silent, on a slip or mini-whiteboard. Recall before help: no notes, no lanes, no hints. Collect before pupils leave.
 Question: Which colour of visible light has the longest wavelength?
-Answer: D   Red. Wavelength decreases from red (about 700 nm) to violet (about 400 nm) across the visible spectrum.
+Answer: C   Red. Wavelength decreases from red (about 700 nm) to violet (about 400 nm) across the visible spectrum.
 Source of this question: gate item 1 re-asked (options rotated) — this chapter has no third quick-check module.
 The ebook also holds task 3, "Stage lights (6 marks)", for homework or the next lesson's do now.
 Sort the slips: correct → ready to move on; incorrect → start next lesson in the pre-teach group, with the read-along and the Support lane. Same destination next time.</a:t>
@@ -1322,7 +1322,7 @@
             <a:r>
               <a:rPr lang="en-US" dirty="0"/>
               <a:t>Answers — task 1: Coloured object, coloured light. Reveal the answer; pupils mark their own work in a different colour, then read the "why" together. Same destination for every lane, so one answer serves the whole class.
-Answer: A   Black
+Answer: D   Black
 Why: A red jumper reflects red and absorbs other colours. In blue light there is no red to reflect, so it absorbs the blue and appears black.
 Ask a Support pupil to explain one step, and a Stretch pupil to share their extension.</a:t>
             </a:r>
@@ -1504,7 +1504,7 @@
             <a:r>
               <a:rPr lang="en-US" dirty="0"/>
               <a:t>Answers — exit ticket: Exit ticket. Reveal the answer; pupils mark their own work in a different colour, then read the "why" together. Same destination for every lane, so one answer serves the whole class.
-Answer: D   Red
+Answer: C   Red
 Why: Wavelength decreases from red (about 700 nm) to violet (about 400 nm) across the visible spectrum.
 Ask a Support pupil to explain one step, and a Stretch pupil to share their extension.</a:t>
             </a:r>
@@ -1595,9 +1595,9 @@
             <a:r>
               <a:rPr lang="en-US" dirty="0"/>
               <a:t>Do now — retrieval. Silent, no notes, no help: recall comes before any support. Give about four minutes.
-1. Which colour of visible light has the longest wavelength?  →  A   Red
+1. Which colour of visible light has the longest wavelength?  →  D   Red
 2. In white light a blue book looks blue because it reflects blue light and ___ the other colours.  →  absorbs
-3. What does a green filter do to white light?  →  A   Transmits green light and absorbs the other colours
+3. What does a green filter do to white light?  →  C   Transmits green light and absorbs the other colours
 Circulate: who gets 3/3 (Stretch route), 2/3 (Core), 0–1 (Support)? Use this to route pupils later in the lesson.</a:t>
             </a:r>
             <a:endParaRPr lang="en-US" dirty="0"/>
@@ -1687,9 +1687,9 @@
             <a:r>
               <a:rPr lang="en-US" dirty="0"/>
               <a:t>Answers — pupils mark their own in a different colour, then hands up for 3/3, 2/3, 1/3.
-1. A   Red. Wavelength decreases from red (about 700 nm) to violet (about 400 nm) across the visible spectrum.
+1. D   Red. Wavelength decreases from red (about 700 nm) to violet (about 400 nm) across the visible spectrum.
 2. absorbs. The colour of an opaque object is the colour it reflects. The wavelengths that are not reflected are absorbed.
-3. A   Transmits green light and absorbs the other colours. A filter works by absorbing some wavelengths and transmitting others. A green filter lets green through and absorbs the rest.
+3. C   Transmits green light and absorbs the other colours. A filter works by absorbing some wavelengths and transmitting others. A green filter lets green through and absorbs the rest.
 Say the route each score points to: 3/3 Stretch, 2/3 Core, 0–1 Support. Pupils may choose to move up.</a:t>
             </a:r>
             <a:endParaRPr lang="en-US" dirty="0"/>
@@ -6169,7 +6169,7 @@
                 <a:ea typeface="Calibri" pitchFamily="34" charset="-122"/>
                 <a:cs typeface="Calibri" pitchFamily="34" charset="-120"/>
               </a:rPr>
-              <a:t>Black      </a:t>
+              <a:t>Magenta      </a:t>
             </a:r>
             <a:pPr algn="ctr" indent="0" marL="0">
               <a:buNone/>
@@ -6197,6 +6197,34 @@
                 <a:ea typeface="Calibri" pitchFamily="34" charset="-122"/>
                 <a:cs typeface="Calibri" pitchFamily="34" charset="-120"/>
               </a:rPr>
+              <a:t>Blue      </a:t>
+            </a:r>
+            <a:pPr algn="ctr" indent="0" marL="0">
+              <a:buNone/>
+            </a:pPr>
+            <a:r>
+              <a:rPr lang="en-US" sz="1800" b="1" dirty="0">
+                <a:solidFill>
+                  <a:srgbClr val="B8862B"/>
+                </a:solidFill>
+                <a:latin typeface="Calibri" pitchFamily="34" charset="0"/>
+                <a:ea typeface="Calibri" pitchFamily="34" charset="-122"/>
+                <a:cs typeface="Calibri" pitchFamily="34" charset="-120"/>
+              </a:rPr>
+              <a:t>C  </a:t>
+            </a:r>
+            <a:pPr algn="ctr" indent="0" marL="0">
+              <a:buNone/>
+            </a:pPr>
+            <a:r>
+              <a:rPr lang="en-US" sz="1800" dirty="0">
+                <a:solidFill>
+                  <a:srgbClr val="1E2229"/>
+                </a:solidFill>
+                <a:latin typeface="Calibri" pitchFamily="34" charset="0"/>
+                <a:ea typeface="Calibri" pitchFamily="34" charset="-122"/>
+                <a:cs typeface="Calibri" pitchFamily="34" charset="-120"/>
+              </a:rPr>
               <a:t>Red      </a:t>
             </a:r>
             <a:pPr algn="ctr" indent="0" marL="0">
@@ -6211,7 +6239,7 @@
                 <a:ea typeface="Calibri" pitchFamily="34" charset="-122"/>
                 <a:cs typeface="Calibri" pitchFamily="34" charset="-120"/>
               </a:rPr>
-              <a:t>C  </a:t>
+              <a:t>D  </a:t>
             </a:r>
             <a:pPr algn="ctr" indent="0" marL="0">
               <a:buNone/>
@@ -6225,35 +6253,7 @@
                 <a:ea typeface="Calibri" pitchFamily="34" charset="-122"/>
                 <a:cs typeface="Calibri" pitchFamily="34" charset="-120"/>
               </a:rPr>
-              <a:t>Blue      </a:t>
-            </a:r>
-            <a:pPr algn="ctr" indent="0" marL="0">
-              <a:buNone/>
-            </a:pPr>
-            <a:r>
-              <a:rPr lang="en-US" sz="1800" b="1" dirty="0">
-                <a:solidFill>
-                  <a:srgbClr val="B8862B"/>
-                </a:solidFill>
-                <a:latin typeface="Calibri" pitchFamily="34" charset="0"/>
-                <a:ea typeface="Calibri" pitchFamily="34" charset="-122"/>
-                <a:cs typeface="Calibri" pitchFamily="34" charset="-120"/>
-              </a:rPr>
-              <a:t>D  </a:t>
-            </a:r>
-            <a:pPr algn="ctr" indent="0" marL="0">
-              <a:buNone/>
-            </a:pPr>
-            <a:r>
-              <a:rPr lang="en-US" sz="1800" dirty="0">
-                <a:solidFill>
-                  <a:srgbClr val="1E2229"/>
-                </a:solidFill>
-                <a:latin typeface="Calibri" pitchFamily="34" charset="0"/>
-                <a:ea typeface="Calibri" pitchFamily="34" charset="-122"/>
-                <a:cs typeface="Calibri" pitchFamily="34" charset="-120"/>
-              </a:rPr>
-              <a:t>Magenta</a:t>
+              <a:t>Black</a:t>
             </a:r>
             <a:endParaRPr lang="en-US" sz="2000" dirty="0"/>
           </a:p>
@@ -9840,7 +9840,7 @@
                 <a:ea typeface="Calibri" pitchFamily="34" charset="-122"/>
                 <a:cs typeface="Calibri" pitchFamily="34" charset="-120"/>
               </a:rPr>
-              <a:t>Green</a:t>
+              <a:t>Violet</a:t>
             </a:r>
             <a:endParaRPr lang="en-US" sz="2400" dirty="0"/>
           </a:p>
@@ -9877,7 +9877,7 @@
                 <a:ea typeface="Calibri" pitchFamily="34" charset="-122"/>
                 <a:cs typeface="Calibri" pitchFamily="34" charset="-120"/>
               </a:rPr>
-              <a:t>Blue</a:t>
+              <a:t>Green</a:t>
             </a:r>
             <a:endParaRPr lang="en-US" sz="2400" dirty="0"/>
           </a:p>
@@ -9914,7 +9914,7 @@
                 <a:ea typeface="Calibri" pitchFamily="34" charset="-122"/>
                 <a:cs typeface="Calibri" pitchFamily="34" charset="-120"/>
               </a:rPr>
-              <a:t>Violet</a:t>
+              <a:t>Red</a:t>
             </a:r>
             <a:endParaRPr lang="en-US" sz="2400" dirty="0"/>
           </a:p>
@@ -9951,7 +9951,7 @@
                 <a:ea typeface="Calibri" pitchFamily="34" charset="-122"/>
                 <a:cs typeface="Calibri" pitchFamily="34" charset="-120"/>
               </a:rPr>
-              <a:t>Red</a:t>
+              <a:t>Blue</a:t>
             </a:r>
             <a:endParaRPr lang="en-US" sz="2400" dirty="0"/>
           </a:p>
@@ -10356,7 +10356,7 @@
                 <a:ea typeface="Cambria" pitchFamily="34" charset="-122"/>
                 <a:cs typeface="Cambria" pitchFamily="34" charset="-120"/>
               </a:rPr>
-              <a:t>A   Black</a:t>
+              <a:t>D   Black</a:t>
             </a:r>
             <a:endParaRPr lang="en-US" sz="1800" dirty="0"/>
           </a:p>
@@ -11422,7 +11422,7 @@
                 <a:ea typeface="Cambria" pitchFamily="34" charset="-122"/>
                 <a:cs typeface="Cambria" pitchFamily="34" charset="-120"/>
               </a:rPr>
-              <a:t>D   Red</a:t>
+              <a:t>C   Red</a:t>
             </a:r>
             <a:endParaRPr lang="en-US" sz="1800" dirty="0"/>
           </a:p>
@@ -11956,7 +11956,7 @@
                 <a:ea typeface="Calibri" pitchFamily="34" charset="-122"/>
                 <a:cs typeface="Calibri" pitchFamily="34" charset="-120"/>
               </a:rPr>
-              <a:t>Red</a:t>
+              <a:t>Blue</a:t>
             </a:r>
             <a:endParaRPr lang="en-US" sz="2400" dirty="0"/>
           </a:p>
@@ -11993,7 +11993,7 @@
                 <a:ea typeface="Calibri" pitchFamily="34" charset="-122"/>
                 <a:cs typeface="Calibri" pitchFamily="34" charset="-120"/>
               </a:rPr>
-              <a:t>Green</a:t>
+              <a:t>Violet</a:t>
             </a:r>
             <a:endParaRPr lang="en-US" sz="2400" dirty="0"/>
           </a:p>
@@ -12030,7 +12030,7 @@
                 <a:ea typeface="Calibri" pitchFamily="34" charset="-122"/>
                 <a:cs typeface="Calibri" pitchFamily="34" charset="-120"/>
               </a:rPr>
-              <a:t>Blue</a:t>
+              <a:t>Green</a:t>
             </a:r>
             <a:endParaRPr lang="en-US" sz="2400" dirty="0"/>
           </a:p>
@@ -12067,7 +12067,7 @@
                 <a:ea typeface="Calibri" pitchFamily="34" charset="-122"/>
                 <a:cs typeface="Calibri" pitchFamily="34" charset="-120"/>
               </a:rPr>
-              <a:t>Violet</a:t>
+              <a:t>Red</a:t>
             </a:r>
             <a:endParaRPr lang="en-US" sz="2400" dirty="0"/>
           </a:p>
@@ -12469,7 +12469,7 @@
                 <a:ea typeface="Calibri" pitchFamily="34" charset="-122"/>
                 <a:cs typeface="Calibri" pitchFamily="34" charset="-120"/>
               </a:rPr>
-              <a:t>Transmits green light and absorbs the other colours</a:t>
+              <a:t>Adds green to the white light</a:t>
             </a:r>
             <a:endParaRPr lang="en-US" sz="1800" dirty="0"/>
           </a:p>
@@ -12506,7 +12506,7 @@
                 <a:ea typeface="Calibri" pitchFamily="34" charset="-122"/>
                 <a:cs typeface="Calibri" pitchFamily="34" charset="-120"/>
               </a:rPr>
-              <a:t>Reflects green light back towards the lamp</a:t>
+              <a:t>Absorbs green light and transmits the rest</a:t>
             </a:r>
             <a:endParaRPr lang="en-US" sz="1800" dirty="0"/>
           </a:p>
@@ -12543,7 +12543,7 @@
                 <a:ea typeface="Calibri" pitchFamily="34" charset="-122"/>
                 <a:cs typeface="Calibri" pitchFamily="34" charset="-120"/>
               </a:rPr>
-              <a:t>Adds green to the white light</a:t>
+              <a:t>Transmits green light and absorbs the other colours</a:t>
             </a:r>
             <a:endParaRPr lang="en-US" sz="1800" dirty="0"/>
           </a:p>
@@ -12580,7 +12580,7 @@
                 <a:ea typeface="Calibri" pitchFamily="34" charset="-122"/>
                 <a:cs typeface="Calibri" pitchFamily="34" charset="-120"/>
               </a:rPr>
-              <a:t>Absorbs green light and transmits the rest</a:t>
+              <a:t>Reflects green light back towards the lamp</a:t>
             </a:r>
             <a:endParaRPr lang="en-US" sz="1800" dirty="0"/>
           </a:p>
@@ -12981,7 +12981,7 @@
                 <a:ea typeface="Calibri" pitchFamily="34" charset="-122"/>
                 <a:cs typeface="Calibri" pitchFamily="34" charset="-120"/>
               </a:rPr>
-              <a:t>A   Red</a:t>
+              <a:t>D   Red</a:t>
             </a:r>
             <a:endParaRPr lang="en-US" sz="2200" dirty="0"/>
           </a:p>
@@ -13481,7 +13481,7 @@
                 <a:ea typeface="Calibri" pitchFamily="34" charset="-122"/>
                 <a:cs typeface="Calibri" pitchFamily="34" charset="-120"/>
               </a:rPr>
-              <a:t>A   Transmits green light and absorbs the other colours</a:t>
+              <a:t>C   Transmits green light and absorbs the other colours</a:t>
             </a:r>
             <a:endParaRPr lang="en-US" sz="2200" dirty="0"/>
           </a:p>

--- a/decks/triple-light/triple-light_ch3_colour.pptx
+++ b/decks/triple-light/triple-light_ch3_colour.pptx
@@ -125,30 +125,30 @@
   <p:extLst>
     <p:ext uri="{521415D9-36F7-43E2-AB2F-B90AF26B5E84}">
       <p14:sectionLst xmlns:p14="http://schemas.microsoft.com/office/powerpoint/2010/main">
-        <p14:section name="Opening" id="{b6d7a5b0-8f32-b5df-d3f6-ee928f7d949a}">
+        <p14:section name="Opening" id="{fbb84420-6db6-9bd4-cc0b-6dc62f7525f1}">
           <p14:sldIdLst>
             <p14:sldId id="256"/>
           </p14:sldIdLst>
         </p14:section>
-        <p14:section name="Gate" id="{ea5ab6fb-2fe7-fdaa-12d9-c680a6d4dbc0}">
+        <p14:section name="Gate" id="{9a6cde80-e524-d2c8-b9d8-f709485529e0}">
           <p14:sldIdLst>
             <p14:sldId id="257"/>
             <p14:sldId id="258"/>
           </p14:sldIdLst>
         </p14:section>
-        <p14:section name="Pre-teach" id="{f1b1a7ce-9c4d-e86e-02b0-06b67f2b5420}">
+        <p14:section name="Pre-teach" id="{8dc73514-ca66-0a04-a141-49cc966bfa28}">
           <p14:sldIdLst>
             <p14:sldId id="259"/>
             <p14:sldId id="260"/>
           </p14:sldIdLst>
         </p14:section>
-        <p14:section name="Read-along" id="{52a7a62e-0291-abb7-c4ec-34781a7eb901}">
+        <p14:section name="Read-along" id="{d199045c-e8e9-86a9-2dba-9091ecc4d961}">
           <p14:sldIdLst>
             <p14:sldId id="261"/>
             <p14:sldId id="262"/>
           </p14:sldIdLst>
         </p14:section>
-        <p14:section name="Teach" id="{40ea41c1-6831-19e5-997e-2e8db3523487}">
+        <p14:section name="Teach" id="{7d8cee7b-8cc0-07fa-c8e3-d06e55130354}">
           <p14:sldIdLst>
             <p14:sldId id="263"/>
             <p14:sldId id="264"/>
@@ -157,19 +157,19 @@
             <p14:sldId id="267"/>
           </p14:sldIdLst>
         </p14:section>
-        <p14:section name="Routes" id="{7de62490-176e-3be0-e386-c176515bab8b}">
+        <p14:section name="Routes" id="{f446af1c-8804-39e4-eaa1-6b23bab996ba}">
           <p14:sldIdLst>
             <p14:sldId id="268"/>
             <p14:sldId id="269"/>
             <p14:sldId id="270"/>
           </p14:sldIdLst>
         </p14:section>
-        <p14:section name="Close" id="{9b6abc03-ff82-f355-6210-565bf61e7887}">
+        <p14:section name="Close" id="{d44c1ccf-ef43-4d40-ba30-d1c962098c2d}">
           <p14:sldIdLst>
             <p14:sldId id="271"/>
           </p14:sldIdLst>
         </p14:section>
-        <p14:section name="Answers" id="{7bcc4f5a-6e67-445f-2870-ab4a1240a1a6}">
+        <p14:section name="Answers" id="{027eebd5-e79c-dba4-c822-0285112bb295}">
           <p14:sldIdLst>
             <p14:sldId id="272"/>
             <p14:sldId id="273"/>
